--- a/docs/pptx/whole/jx-scatter-cg-epi-age75.pptx
+++ b/docs/pptx/whole/jx-scatter-cg-epi-age75.pptx
@@ -36084,7 +36084,2067 @@
         </p:sp>
         <p:sp>
           <p:nvSpPr>
-            <p:cNvPr id="966" name="tx966"/>
+            <p:cNvPr id="966" name="pg966"/>
+            <p:cNvSpPr/>
+            <p:nvPr/>
+          </p:nvSpPr>
+          <p:spPr>
+            <a:xfrm>
+              <a:off x="1985667" y="2846459"/>
+              <a:ext cx="6631543" cy="1881288"/>
+            </a:xfrm>
+            <a:custGeom>
+              <a:avLst/>
+              <a:pathLst>
+                <a:path w="6631543" h="1881288">
+                  <a:moveTo>
+                    <a:pt x="0" y="1789582"/>
+                  </a:moveTo>
+                  <a:lnTo>
+                    <a:pt x="162925" y="1748365"/>
+                  </a:lnTo>
+                  <a:lnTo>
+                    <a:pt x="325851" y="1707120"/>
+                  </a:lnTo>
+                  <a:lnTo>
+                    <a:pt x="488776" y="1665841"/>
+                  </a:lnTo>
+                  <a:lnTo>
+                    <a:pt x="651702" y="1624523"/>
+                  </a:lnTo>
+                  <a:lnTo>
+                    <a:pt x="814628" y="1583158"/>
+                  </a:lnTo>
+                  <a:lnTo>
+                    <a:pt x="977553" y="1541736"/>
+                  </a:lnTo>
+                  <a:lnTo>
+                    <a:pt x="1140479" y="1500247"/>
+                  </a:lnTo>
+                  <a:lnTo>
+                    <a:pt x="1303404" y="1458676"/>
+                  </a:lnTo>
+                  <a:lnTo>
+                    <a:pt x="1466330" y="1417006"/>
+                  </a:lnTo>
+                  <a:lnTo>
+                    <a:pt x="1629256" y="1375213"/>
+                  </a:lnTo>
+                  <a:lnTo>
+                    <a:pt x="1792181" y="1333273"/>
+                  </a:lnTo>
+                  <a:lnTo>
+                    <a:pt x="1955107" y="1291152"/>
+                  </a:lnTo>
+                  <a:lnTo>
+                    <a:pt x="2118033" y="1248816"/>
+                  </a:lnTo>
+                  <a:lnTo>
+                    <a:pt x="2280958" y="1206226"/>
+                  </a:lnTo>
+                  <a:lnTo>
+                    <a:pt x="2443884" y="1163347"/>
+                  </a:lnTo>
+                  <a:lnTo>
+                    <a:pt x="2606809" y="1120149"/>
+                  </a:lnTo>
+                  <a:lnTo>
+                    <a:pt x="2769735" y="1076618"/>
+                  </a:lnTo>
+                  <a:lnTo>
+                    <a:pt x="2932661" y="1032753"/>
+                  </a:lnTo>
+                  <a:lnTo>
+                    <a:pt x="3095586" y="988574"/>
+                  </a:lnTo>
+                  <a:lnTo>
+                    <a:pt x="3258512" y="944109"/>
+                  </a:lnTo>
+                  <a:lnTo>
+                    <a:pt x="3421438" y="899395"/>
+                  </a:lnTo>
+                  <a:lnTo>
+                    <a:pt x="3584363" y="854471"/>
+                  </a:lnTo>
+                  <a:lnTo>
+                    <a:pt x="3747289" y="809370"/>
+                  </a:lnTo>
+                  <a:lnTo>
+                    <a:pt x="3910214" y="764126"/>
+                  </a:lnTo>
+                  <a:lnTo>
+                    <a:pt x="4073140" y="718762"/>
+                  </a:lnTo>
+                  <a:lnTo>
+                    <a:pt x="4236066" y="673301"/>
+                  </a:lnTo>
+                  <a:lnTo>
+                    <a:pt x="4398991" y="627760"/>
+                  </a:lnTo>
+                  <a:lnTo>
+                    <a:pt x="4561917" y="582153"/>
+                  </a:lnTo>
+                  <a:lnTo>
+                    <a:pt x="4724843" y="536492"/>
+                  </a:lnTo>
+                  <a:lnTo>
+                    <a:pt x="4887768" y="490784"/>
+                  </a:lnTo>
+                  <a:lnTo>
+                    <a:pt x="5050694" y="445037"/>
+                  </a:lnTo>
+                  <a:lnTo>
+                    <a:pt x="5213619" y="399258"/>
+                  </a:lnTo>
+                  <a:lnTo>
+                    <a:pt x="5376545" y="353452"/>
+                  </a:lnTo>
+                  <a:lnTo>
+                    <a:pt x="5539471" y="307621"/>
+                  </a:lnTo>
+                  <a:lnTo>
+                    <a:pt x="5702396" y="261769"/>
+                  </a:lnTo>
+                  <a:lnTo>
+                    <a:pt x="5865322" y="215900"/>
+                  </a:lnTo>
+                  <a:lnTo>
+                    <a:pt x="6028248" y="170015"/>
+                  </a:lnTo>
+                  <a:lnTo>
+                    <a:pt x="6191173" y="124116"/>
+                  </a:lnTo>
+                  <a:lnTo>
+                    <a:pt x="6354099" y="78205"/>
+                  </a:lnTo>
+                  <a:lnTo>
+                    <a:pt x="6517024" y="32284"/>
+                  </a:lnTo>
+                  <a:lnTo>
+                    <a:pt x="6631543" y="0"/>
+                  </a:lnTo>
+                  <a:lnTo>
+                    <a:pt x="6631543" y="128884"/>
+                  </a:lnTo>
+                  <a:lnTo>
+                    <a:pt x="6517024" y="157765"/>
+                  </a:lnTo>
+                  <a:lnTo>
+                    <a:pt x="6354099" y="198864"/>
+                  </a:lnTo>
+                  <a:lnTo>
+                    <a:pt x="6191173" y="239974"/>
+                  </a:lnTo>
+                  <a:lnTo>
+                    <a:pt x="6028248" y="281096"/>
+                  </a:lnTo>
+                  <a:lnTo>
+                    <a:pt x="5865322" y="322231"/>
+                  </a:lnTo>
+                  <a:lnTo>
+                    <a:pt x="5702396" y="363383"/>
+                  </a:lnTo>
+                  <a:lnTo>
+                    <a:pt x="5539471" y="404552"/>
+                  </a:lnTo>
+                  <a:lnTo>
+                    <a:pt x="5376545" y="445741"/>
+                  </a:lnTo>
+                  <a:lnTo>
+                    <a:pt x="5213619" y="486955"/>
+                  </a:lnTo>
+                  <a:lnTo>
+                    <a:pt x="5050694" y="528196"/>
+                  </a:lnTo>
+                  <a:lnTo>
+                    <a:pt x="4887768" y="569471"/>
+                  </a:lnTo>
+                  <a:lnTo>
+                    <a:pt x="4724843" y="610783"/>
+                  </a:lnTo>
+                  <a:lnTo>
+                    <a:pt x="4561917" y="652142"/>
+                  </a:lnTo>
+                  <a:lnTo>
+                    <a:pt x="4398991" y="693556"/>
+                  </a:lnTo>
+                  <a:lnTo>
+                    <a:pt x="4236066" y="735035"/>
+                  </a:lnTo>
+                  <a:lnTo>
+                    <a:pt x="4073140" y="776595"/>
+                  </a:lnTo>
+                  <a:lnTo>
+                    <a:pt x="3910214" y="818252"/>
+                  </a:lnTo>
+                  <a:lnTo>
+                    <a:pt x="3747289" y="860028"/>
+                  </a:lnTo>
+                  <a:lnTo>
+                    <a:pt x="3584363" y="901948"/>
+                  </a:lnTo>
+                  <a:lnTo>
+                    <a:pt x="3421438" y="944044"/>
+                  </a:lnTo>
+                  <a:lnTo>
+                    <a:pt x="3258512" y="986351"/>
+                  </a:lnTo>
+                  <a:lnTo>
+                    <a:pt x="3095586" y="1028907"/>
+                  </a:lnTo>
+                  <a:lnTo>
+                    <a:pt x="2932661" y="1071748"/>
+                  </a:lnTo>
+                  <a:lnTo>
+                    <a:pt x="2769735" y="1114904"/>
+                  </a:lnTo>
+                  <a:lnTo>
+                    <a:pt x="2606809" y="1158393"/>
+                  </a:lnTo>
+                  <a:lnTo>
+                    <a:pt x="2443884" y="1202216"/>
+                  </a:lnTo>
+                  <a:lnTo>
+                    <a:pt x="2280958" y="1246357"/>
+                  </a:lnTo>
+                  <a:lnTo>
+                    <a:pt x="2118033" y="1290788"/>
+                  </a:lnTo>
+                  <a:lnTo>
+                    <a:pt x="1955107" y="1335472"/>
+                  </a:lnTo>
+                  <a:lnTo>
+                    <a:pt x="1792181" y="1380372"/>
+                  </a:lnTo>
+                  <a:lnTo>
+                    <a:pt x="1629256" y="1425452"/>
+                  </a:lnTo>
+                  <a:lnTo>
+                    <a:pt x="1466330" y="1470680"/>
+                  </a:lnTo>
+                  <a:lnTo>
+                    <a:pt x="1303404" y="1516030"/>
+                  </a:lnTo>
+                  <a:lnTo>
+                    <a:pt x="1140479" y="1561479"/>
+                  </a:lnTo>
+                  <a:lnTo>
+                    <a:pt x="977553" y="1607011"/>
+                  </a:lnTo>
+                  <a:lnTo>
+                    <a:pt x="814628" y="1652610"/>
+                  </a:lnTo>
+                  <a:lnTo>
+                    <a:pt x="651702" y="1698265"/>
+                  </a:lnTo>
+                  <a:lnTo>
+                    <a:pt x="488776" y="1743968"/>
+                  </a:lnTo>
+                  <a:lnTo>
+                    <a:pt x="325851" y="1789710"/>
+                  </a:lnTo>
+                  <a:lnTo>
+                    <a:pt x="162925" y="1835485"/>
+                  </a:lnTo>
+                  <a:lnTo>
+                    <a:pt x="0" y="1881288"/>
+                  </a:lnTo>
+                  <a:close/>
+                </a:path>
+              </a:pathLst>
+            </a:custGeom>
+            <a:solidFill>
+              <a:srgbClr val="999999">
+                <a:alpha val="14901"/>
+              </a:srgbClr>
+            </a:solidFill>
+          </p:spPr>
+          <p:txBody>
+            <a:bodyPr/>
+            <a:lstStyle/>
+            <a:p/>
+          </p:txBody>
+        </p:sp>
+        <p:sp>
+          <p:nvSpPr>
+            <p:cNvPr id="967" name="pl967"/>
+            <p:cNvSpPr/>
+            <p:nvPr/>
+          </p:nvSpPr>
+          <p:spPr>
+            <a:xfrm>
+              <a:off x="1985667" y="2846459"/>
+              <a:ext cx="6631543" cy="1789582"/>
+            </a:xfrm>
+            <a:custGeom>
+              <a:avLst/>
+              <a:pathLst>
+                <a:path w="6631543" h="1789582">
+                  <a:moveTo>
+                    <a:pt x="0" y="1789582"/>
+                  </a:moveTo>
+                  <a:lnTo>
+                    <a:pt x="162925" y="1748365"/>
+                  </a:lnTo>
+                  <a:lnTo>
+                    <a:pt x="325851" y="1707120"/>
+                  </a:lnTo>
+                  <a:lnTo>
+                    <a:pt x="488776" y="1665841"/>
+                  </a:lnTo>
+                  <a:lnTo>
+                    <a:pt x="651702" y="1624523"/>
+                  </a:lnTo>
+                  <a:lnTo>
+                    <a:pt x="814628" y="1583158"/>
+                  </a:lnTo>
+                  <a:lnTo>
+                    <a:pt x="977553" y="1541736"/>
+                  </a:lnTo>
+                  <a:lnTo>
+                    <a:pt x="1140479" y="1500247"/>
+                  </a:lnTo>
+                  <a:lnTo>
+                    <a:pt x="1303404" y="1458676"/>
+                  </a:lnTo>
+                  <a:lnTo>
+                    <a:pt x="1466330" y="1417006"/>
+                  </a:lnTo>
+                  <a:lnTo>
+                    <a:pt x="1629256" y="1375213"/>
+                  </a:lnTo>
+                  <a:lnTo>
+                    <a:pt x="1792181" y="1333273"/>
+                  </a:lnTo>
+                  <a:lnTo>
+                    <a:pt x="1955107" y="1291152"/>
+                  </a:lnTo>
+                  <a:lnTo>
+                    <a:pt x="2118033" y="1248816"/>
+                  </a:lnTo>
+                  <a:lnTo>
+                    <a:pt x="2280958" y="1206226"/>
+                  </a:lnTo>
+                  <a:lnTo>
+                    <a:pt x="2443884" y="1163347"/>
+                  </a:lnTo>
+                  <a:lnTo>
+                    <a:pt x="2606809" y="1120149"/>
+                  </a:lnTo>
+                  <a:lnTo>
+                    <a:pt x="2769735" y="1076618"/>
+                  </a:lnTo>
+                  <a:lnTo>
+                    <a:pt x="2932661" y="1032753"/>
+                  </a:lnTo>
+                  <a:lnTo>
+                    <a:pt x="3095586" y="988574"/>
+                  </a:lnTo>
+                  <a:lnTo>
+                    <a:pt x="3258512" y="944109"/>
+                  </a:lnTo>
+                  <a:lnTo>
+                    <a:pt x="3421438" y="899395"/>
+                  </a:lnTo>
+                  <a:lnTo>
+                    <a:pt x="3584363" y="854471"/>
+                  </a:lnTo>
+                  <a:lnTo>
+                    <a:pt x="3747289" y="809370"/>
+                  </a:lnTo>
+                  <a:lnTo>
+                    <a:pt x="3910214" y="764126"/>
+                  </a:lnTo>
+                  <a:lnTo>
+                    <a:pt x="4073140" y="718762"/>
+                  </a:lnTo>
+                  <a:lnTo>
+                    <a:pt x="4236066" y="673301"/>
+                  </a:lnTo>
+                  <a:lnTo>
+                    <a:pt x="4398991" y="627760"/>
+                  </a:lnTo>
+                  <a:lnTo>
+                    <a:pt x="4561917" y="582153"/>
+                  </a:lnTo>
+                  <a:lnTo>
+                    <a:pt x="4724843" y="536492"/>
+                  </a:lnTo>
+                  <a:lnTo>
+                    <a:pt x="4887768" y="490784"/>
+                  </a:lnTo>
+                  <a:lnTo>
+                    <a:pt x="5050694" y="445037"/>
+                  </a:lnTo>
+                  <a:lnTo>
+                    <a:pt x="5213619" y="399258"/>
+                  </a:lnTo>
+                  <a:lnTo>
+                    <a:pt x="5376545" y="353452"/>
+                  </a:lnTo>
+                  <a:lnTo>
+                    <a:pt x="5539471" y="307621"/>
+                  </a:lnTo>
+                  <a:lnTo>
+                    <a:pt x="5702396" y="261769"/>
+                  </a:lnTo>
+                  <a:lnTo>
+                    <a:pt x="5865322" y="215900"/>
+                  </a:lnTo>
+                  <a:lnTo>
+                    <a:pt x="6028248" y="170015"/>
+                  </a:lnTo>
+                  <a:lnTo>
+                    <a:pt x="6191173" y="124116"/>
+                  </a:lnTo>
+                  <a:lnTo>
+                    <a:pt x="6354099" y="78205"/>
+                  </a:lnTo>
+                  <a:lnTo>
+                    <a:pt x="6517024" y="32284"/>
+                  </a:lnTo>
+                  <a:lnTo>
+                    <a:pt x="6631543" y="0"/>
+                  </a:lnTo>
+                </a:path>
+              </a:pathLst>
+            </a:custGeom>
+          </p:spPr>
+          <p:txBody>
+            <a:bodyPr/>
+            <a:lstStyle/>
+            <a:p/>
+          </p:txBody>
+        </p:sp>
+        <p:sp>
+          <p:nvSpPr>
+            <p:cNvPr id="968" name="pl968"/>
+            <p:cNvSpPr/>
+            <p:nvPr/>
+          </p:nvSpPr>
+          <p:spPr>
+            <a:xfrm>
+              <a:off x="1985667" y="2975343"/>
+              <a:ext cx="6631543" cy="1752404"/>
+            </a:xfrm>
+            <a:custGeom>
+              <a:avLst/>
+              <a:pathLst>
+                <a:path w="6631543" h="1752404">
+                  <a:moveTo>
+                    <a:pt x="6631543" y="0"/>
+                  </a:moveTo>
+                  <a:lnTo>
+                    <a:pt x="6517024" y="28881"/>
+                  </a:lnTo>
+                  <a:lnTo>
+                    <a:pt x="6354099" y="69980"/>
+                  </a:lnTo>
+                  <a:lnTo>
+                    <a:pt x="6191173" y="111090"/>
+                  </a:lnTo>
+                  <a:lnTo>
+                    <a:pt x="6028248" y="152212"/>
+                  </a:lnTo>
+                  <a:lnTo>
+                    <a:pt x="5865322" y="193347"/>
+                  </a:lnTo>
+                  <a:lnTo>
+                    <a:pt x="5702396" y="234498"/>
+                  </a:lnTo>
+                  <a:lnTo>
+                    <a:pt x="5539471" y="275667"/>
+                  </a:lnTo>
+                  <a:lnTo>
+                    <a:pt x="5376545" y="316857"/>
+                  </a:lnTo>
+                  <a:lnTo>
+                    <a:pt x="5213619" y="358071"/>
+                  </a:lnTo>
+                  <a:lnTo>
+                    <a:pt x="5050694" y="399312"/>
+                  </a:lnTo>
+                  <a:lnTo>
+                    <a:pt x="4887768" y="440586"/>
+                  </a:lnTo>
+                  <a:lnTo>
+                    <a:pt x="4724843" y="481899"/>
+                  </a:lnTo>
+                  <a:lnTo>
+                    <a:pt x="4561917" y="523258"/>
+                  </a:lnTo>
+                  <a:lnTo>
+                    <a:pt x="4398991" y="564671"/>
+                  </a:lnTo>
+                  <a:lnTo>
+                    <a:pt x="4236066" y="606151"/>
+                  </a:lnTo>
+                  <a:lnTo>
+                    <a:pt x="4073140" y="647711"/>
+                  </a:lnTo>
+                  <a:lnTo>
+                    <a:pt x="3910214" y="689368"/>
+                  </a:lnTo>
+                  <a:lnTo>
+                    <a:pt x="3747289" y="731143"/>
+                  </a:lnTo>
+                  <a:lnTo>
+                    <a:pt x="3584363" y="773064"/>
+                  </a:lnTo>
+                  <a:lnTo>
+                    <a:pt x="3421438" y="815160"/>
+                  </a:lnTo>
+                  <a:lnTo>
+                    <a:pt x="3258512" y="857467"/>
+                  </a:lnTo>
+                  <a:lnTo>
+                    <a:pt x="3095586" y="900022"/>
+                  </a:lnTo>
+                  <a:lnTo>
+                    <a:pt x="2932661" y="942863"/>
+                  </a:lnTo>
+                  <a:lnTo>
+                    <a:pt x="2769735" y="986019"/>
+                  </a:lnTo>
+                  <a:lnTo>
+                    <a:pt x="2606809" y="1029508"/>
+                  </a:lnTo>
+                  <a:lnTo>
+                    <a:pt x="2443884" y="1073331"/>
+                  </a:lnTo>
+                  <a:lnTo>
+                    <a:pt x="2280958" y="1117473"/>
+                  </a:lnTo>
+                  <a:lnTo>
+                    <a:pt x="2118033" y="1161903"/>
+                  </a:lnTo>
+                  <a:lnTo>
+                    <a:pt x="1955107" y="1206588"/>
+                  </a:lnTo>
+                  <a:lnTo>
+                    <a:pt x="1792181" y="1251487"/>
+                  </a:lnTo>
+                  <a:lnTo>
+                    <a:pt x="1629256" y="1296567"/>
+                  </a:lnTo>
+                  <a:lnTo>
+                    <a:pt x="1466330" y="1341795"/>
+                  </a:lnTo>
+                  <a:lnTo>
+                    <a:pt x="1303404" y="1387145"/>
+                  </a:lnTo>
+                  <a:lnTo>
+                    <a:pt x="1140479" y="1432595"/>
+                  </a:lnTo>
+                  <a:lnTo>
+                    <a:pt x="977553" y="1478126"/>
+                  </a:lnTo>
+                  <a:lnTo>
+                    <a:pt x="814628" y="1523726"/>
+                  </a:lnTo>
+                  <a:lnTo>
+                    <a:pt x="651702" y="1569381"/>
+                  </a:lnTo>
+                  <a:lnTo>
+                    <a:pt x="488776" y="1615083"/>
+                  </a:lnTo>
+                  <a:lnTo>
+                    <a:pt x="325851" y="1660825"/>
+                  </a:lnTo>
+                  <a:lnTo>
+                    <a:pt x="162925" y="1706600"/>
+                  </a:lnTo>
+                  <a:lnTo>
+                    <a:pt x="0" y="1752404"/>
+                  </a:lnTo>
+                </a:path>
+              </a:pathLst>
+            </a:custGeom>
+          </p:spPr>
+          <p:txBody>
+            <a:bodyPr/>
+            <a:lstStyle/>
+            <a:p/>
+          </p:txBody>
+        </p:sp>
+        <p:sp>
+          <p:nvSpPr>
+            <p:cNvPr id="969" name="pl969"/>
+            <p:cNvSpPr/>
+            <p:nvPr/>
+          </p:nvSpPr>
+          <p:spPr>
+            <a:xfrm>
+              <a:off x="1985667" y="2910901"/>
+              <a:ext cx="6631543" cy="1770993"/>
+            </a:xfrm>
+            <a:custGeom>
+              <a:avLst/>
+              <a:pathLst>
+                <a:path w="6631543" h="1770993">
+                  <a:moveTo>
+                    <a:pt x="0" y="1770993"/>
+                  </a:moveTo>
+                  <a:lnTo>
+                    <a:pt x="162925" y="1727483"/>
+                  </a:lnTo>
+                  <a:lnTo>
+                    <a:pt x="325851" y="1683972"/>
+                  </a:lnTo>
+                  <a:lnTo>
+                    <a:pt x="488776" y="1640462"/>
+                  </a:lnTo>
+                  <a:lnTo>
+                    <a:pt x="651702" y="1596952"/>
+                  </a:lnTo>
+                  <a:lnTo>
+                    <a:pt x="814628" y="1553442"/>
+                  </a:lnTo>
+                  <a:lnTo>
+                    <a:pt x="977553" y="1509931"/>
+                  </a:lnTo>
+                  <a:lnTo>
+                    <a:pt x="1140479" y="1466421"/>
+                  </a:lnTo>
+                  <a:lnTo>
+                    <a:pt x="1303404" y="1422911"/>
+                  </a:lnTo>
+                  <a:lnTo>
+                    <a:pt x="1466330" y="1379401"/>
+                  </a:lnTo>
+                  <a:lnTo>
+                    <a:pt x="1629256" y="1335890"/>
+                  </a:lnTo>
+                  <a:lnTo>
+                    <a:pt x="1792181" y="1292380"/>
+                  </a:lnTo>
+                  <a:lnTo>
+                    <a:pt x="1955107" y="1248870"/>
+                  </a:lnTo>
+                  <a:lnTo>
+                    <a:pt x="2118033" y="1205360"/>
+                  </a:lnTo>
+                  <a:lnTo>
+                    <a:pt x="2280958" y="1161849"/>
+                  </a:lnTo>
+                  <a:lnTo>
+                    <a:pt x="2443884" y="1118339"/>
+                  </a:lnTo>
+                  <a:lnTo>
+                    <a:pt x="2606809" y="1074829"/>
+                  </a:lnTo>
+                  <a:lnTo>
+                    <a:pt x="2769735" y="1031318"/>
+                  </a:lnTo>
+                  <a:lnTo>
+                    <a:pt x="2932661" y="987808"/>
+                  </a:lnTo>
+                  <a:lnTo>
+                    <a:pt x="3095586" y="944298"/>
+                  </a:lnTo>
+                  <a:lnTo>
+                    <a:pt x="3258512" y="900788"/>
+                  </a:lnTo>
+                  <a:lnTo>
+                    <a:pt x="3421438" y="857277"/>
+                  </a:lnTo>
+                  <a:lnTo>
+                    <a:pt x="3584363" y="813767"/>
+                  </a:lnTo>
+                  <a:lnTo>
+                    <a:pt x="3747289" y="770257"/>
+                  </a:lnTo>
+                  <a:lnTo>
+                    <a:pt x="3910214" y="726747"/>
+                  </a:lnTo>
+                  <a:lnTo>
+                    <a:pt x="4073140" y="683236"/>
+                  </a:lnTo>
+                  <a:lnTo>
+                    <a:pt x="4236066" y="639726"/>
+                  </a:lnTo>
+                  <a:lnTo>
+                    <a:pt x="4398991" y="596216"/>
+                  </a:lnTo>
+                  <a:lnTo>
+                    <a:pt x="4561917" y="552706"/>
+                  </a:lnTo>
+                  <a:lnTo>
+                    <a:pt x="4724843" y="509195"/>
+                  </a:lnTo>
+                  <a:lnTo>
+                    <a:pt x="4887768" y="465685"/>
+                  </a:lnTo>
+                  <a:lnTo>
+                    <a:pt x="5050694" y="422175"/>
+                  </a:lnTo>
+                  <a:lnTo>
+                    <a:pt x="5213619" y="378665"/>
+                  </a:lnTo>
+                  <a:lnTo>
+                    <a:pt x="5376545" y="335154"/>
+                  </a:lnTo>
+                  <a:lnTo>
+                    <a:pt x="5539471" y="291644"/>
+                  </a:lnTo>
+                  <a:lnTo>
+                    <a:pt x="5702396" y="248134"/>
+                  </a:lnTo>
+                  <a:lnTo>
+                    <a:pt x="5865322" y="204623"/>
+                  </a:lnTo>
+                  <a:lnTo>
+                    <a:pt x="6028248" y="161113"/>
+                  </a:lnTo>
+                  <a:lnTo>
+                    <a:pt x="6191173" y="117603"/>
+                  </a:lnTo>
+                  <a:lnTo>
+                    <a:pt x="6354099" y="74093"/>
+                  </a:lnTo>
+                  <a:lnTo>
+                    <a:pt x="6517024" y="30582"/>
+                  </a:lnTo>
+                  <a:lnTo>
+                    <a:pt x="6631543" y="0"/>
+                  </a:lnTo>
+                </a:path>
+              </a:pathLst>
+            </a:custGeom>
+            <a:ln w="27101" cap="flat">
+              <a:solidFill>
+                <a:srgbClr val="999999">
+                  <a:alpha val="100000"/>
+                </a:srgbClr>
+              </a:solidFill>
+              <a:prstDash val="solid"/>
+              <a:round/>
+            </a:ln>
+          </p:spPr>
+          <p:txBody>
+            <a:bodyPr/>
+            <a:lstStyle/>
+            <a:p/>
+          </p:txBody>
+        </p:sp>
+        <p:sp>
+          <p:nvSpPr>
+            <p:cNvPr id="970" name="pg970"/>
+            <p:cNvSpPr/>
+            <p:nvPr/>
+          </p:nvSpPr>
+          <p:spPr>
+            <a:xfrm>
+              <a:off x="2171462" y="3392835"/>
+              <a:ext cx="3326594" cy="1592610"/>
+            </a:xfrm>
+            <a:custGeom>
+              <a:avLst/>
+              <a:pathLst>
+                <a:path w="3326594" h="1592610">
+                  <a:moveTo>
+                    <a:pt x="0" y="1453054"/>
+                  </a:moveTo>
+                  <a:lnTo>
+                    <a:pt x="42108" y="1436885"/>
+                  </a:lnTo>
+                  <a:lnTo>
+                    <a:pt x="84217" y="1420705"/>
+                  </a:lnTo>
+                  <a:lnTo>
+                    <a:pt x="126326" y="1404511"/>
+                  </a:lnTo>
+                  <a:lnTo>
+                    <a:pt x="168435" y="1388304"/>
+                  </a:lnTo>
+                  <a:lnTo>
+                    <a:pt x="210543" y="1372082"/>
+                  </a:lnTo>
+                  <a:lnTo>
+                    <a:pt x="252652" y="1355844"/>
+                  </a:lnTo>
+                  <a:lnTo>
+                    <a:pt x="294761" y="1339588"/>
+                  </a:lnTo>
+                  <a:lnTo>
+                    <a:pt x="336870" y="1323313"/>
+                  </a:lnTo>
+                  <a:lnTo>
+                    <a:pt x="378979" y="1307016"/>
+                  </a:lnTo>
+                  <a:lnTo>
+                    <a:pt x="421087" y="1290696"/>
+                  </a:lnTo>
+                  <a:lnTo>
+                    <a:pt x="463196" y="1274351"/>
+                  </a:lnTo>
+                  <a:lnTo>
+                    <a:pt x="505305" y="1257977"/>
+                  </a:lnTo>
+                  <a:lnTo>
+                    <a:pt x="547414" y="1241572"/>
+                  </a:lnTo>
+                  <a:lnTo>
+                    <a:pt x="589523" y="1225132"/>
+                  </a:lnTo>
+                  <a:lnTo>
+                    <a:pt x="631631" y="1208654"/>
+                  </a:lnTo>
+                  <a:lnTo>
+                    <a:pt x="673740" y="1192135"/>
+                  </a:lnTo>
+                  <a:lnTo>
+                    <a:pt x="715849" y="1175569"/>
+                  </a:lnTo>
+                  <a:lnTo>
+                    <a:pt x="757958" y="1158951"/>
+                  </a:lnTo>
+                  <a:lnTo>
+                    <a:pt x="800067" y="1142276"/>
+                  </a:lnTo>
+                  <a:lnTo>
+                    <a:pt x="842175" y="1125538"/>
+                  </a:lnTo>
+                  <a:lnTo>
+                    <a:pt x="884284" y="1108731"/>
+                  </a:lnTo>
+                  <a:lnTo>
+                    <a:pt x="926393" y="1091846"/>
+                  </a:lnTo>
+                  <a:lnTo>
+                    <a:pt x="968502" y="1074878"/>
+                  </a:lnTo>
+                  <a:lnTo>
+                    <a:pt x="1010611" y="1057818"/>
+                  </a:lnTo>
+                  <a:lnTo>
+                    <a:pt x="1052719" y="1040657"/>
+                  </a:lnTo>
+                  <a:lnTo>
+                    <a:pt x="1094828" y="1023389"/>
+                  </a:lnTo>
+                  <a:lnTo>
+                    <a:pt x="1136937" y="1006005"/>
+                  </a:lnTo>
+                  <a:lnTo>
+                    <a:pt x="1179046" y="988499"/>
+                  </a:lnTo>
+                  <a:lnTo>
+                    <a:pt x="1221155" y="970865"/>
+                  </a:lnTo>
+                  <a:lnTo>
+                    <a:pt x="1263263" y="953097"/>
+                  </a:lnTo>
+                  <a:lnTo>
+                    <a:pt x="1305372" y="935194"/>
+                  </a:lnTo>
+                  <a:lnTo>
+                    <a:pt x="1347481" y="917154"/>
+                  </a:lnTo>
+                  <a:lnTo>
+                    <a:pt x="1389590" y="898977"/>
+                  </a:lnTo>
+                  <a:lnTo>
+                    <a:pt x="1431698" y="880666"/>
+                  </a:lnTo>
+                  <a:lnTo>
+                    <a:pt x="1473807" y="862225"/>
+                  </a:lnTo>
+                  <a:lnTo>
+                    <a:pt x="1515916" y="843659"/>
+                  </a:lnTo>
+                  <a:lnTo>
+                    <a:pt x="1558025" y="824976"/>
+                  </a:lnTo>
+                  <a:lnTo>
+                    <a:pt x="1600134" y="806183"/>
+                  </a:lnTo>
+                  <a:lnTo>
+                    <a:pt x="1642242" y="787287"/>
+                  </a:lnTo>
+                  <a:lnTo>
+                    <a:pt x="1684351" y="768297"/>
+                  </a:lnTo>
+                  <a:lnTo>
+                    <a:pt x="1726460" y="749220"/>
+                  </a:lnTo>
+                  <a:lnTo>
+                    <a:pt x="1768569" y="730064"/>
+                  </a:lnTo>
+                  <a:lnTo>
+                    <a:pt x="1810678" y="710836"/>
+                  </a:lnTo>
+                  <a:lnTo>
+                    <a:pt x="1852786" y="691543"/>
+                  </a:lnTo>
+                  <a:lnTo>
+                    <a:pt x="1894895" y="672191"/>
+                  </a:lnTo>
+                  <a:lnTo>
+                    <a:pt x="1937004" y="652786"/>
+                  </a:lnTo>
+                  <a:lnTo>
+                    <a:pt x="1979113" y="633333"/>
+                  </a:lnTo>
+                  <a:lnTo>
+                    <a:pt x="2021222" y="613836"/>
+                  </a:lnTo>
+                  <a:lnTo>
+                    <a:pt x="2063330" y="594300"/>
+                  </a:lnTo>
+                  <a:lnTo>
+                    <a:pt x="2105439" y="574729"/>
+                  </a:lnTo>
+                  <a:lnTo>
+                    <a:pt x="2147548" y="555125"/>
+                  </a:lnTo>
+                  <a:lnTo>
+                    <a:pt x="2189657" y="535492"/>
+                  </a:lnTo>
+                  <a:lnTo>
+                    <a:pt x="2231766" y="515833"/>
+                  </a:lnTo>
+                  <a:lnTo>
+                    <a:pt x="2273874" y="496150"/>
+                  </a:lnTo>
+                  <a:lnTo>
+                    <a:pt x="2315983" y="476444"/>
+                  </a:lnTo>
+                  <a:lnTo>
+                    <a:pt x="2358092" y="456719"/>
+                  </a:lnTo>
+                  <a:lnTo>
+                    <a:pt x="2400201" y="436976"/>
+                  </a:lnTo>
+                  <a:lnTo>
+                    <a:pt x="2442310" y="417216"/>
+                  </a:lnTo>
+                  <a:lnTo>
+                    <a:pt x="2484418" y="397440"/>
+                  </a:lnTo>
+                  <a:lnTo>
+                    <a:pt x="2526527" y="377651"/>
+                  </a:lnTo>
+                  <a:lnTo>
+                    <a:pt x="2568636" y="357848"/>
+                  </a:lnTo>
+                  <a:lnTo>
+                    <a:pt x="2610745" y="338034"/>
+                  </a:lnTo>
+                  <a:lnTo>
+                    <a:pt x="2652854" y="318208"/>
+                  </a:lnTo>
+                  <a:lnTo>
+                    <a:pt x="2694962" y="298372"/>
+                  </a:lnTo>
+                  <a:lnTo>
+                    <a:pt x="2737071" y="278527"/>
+                  </a:lnTo>
+                  <a:lnTo>
+                    <a:pt x="2779180" y="258674"/>
+                  </a:lnTo>
+                  <a:lnTo>
+                    <a:pt x="2821289" y="238812"/>
+                  </a:lnTo>
+                  <a:lnTo>
+                    <a:pt x="2863397" y="218942"/>
+                  </a:lnTo>
+                  <a:lnTo>
+                    <a:pt x="2905506" y="199065"/>
+                  </a:lnTo>
+                  <a:lnTo>
+                    <a:pt x="2947615" y="179182"/>
+                  </a:lnTo>
+                  <a:lnTo>
+                    <a:pt x="2989724" y="159293"/>
+                  </a:lnTo>
+                  <a:lnTo>
+                    <a:pt x="3031833" y="139398"/>
+                  </a:lnTo>
+                  <a:lnTo>
+                    <a:pt x="3073941" y="119498"/>
+                  </a:lnTo>
+                  <a:lnTo>
+                    <a:pt x="3116050" y="99592"/>
+                  </a:lnTo>
+                  <a:lnTo>
+                    <a:pt x="3158159" y="79682"/>
+                  </a:lnTo>
+                  <a:lnTo>
+                    <a:pt x="3200268" y="59767"/>
+                  </a:lnTo>
+                  <a:lnTo>
+                    <a:pt x="3242377" y="39849"/>
+                  </a:lnTo>
+                  <a:lnTo>
+                    <a:pt x="3284485" y="19926"/>
+                  </a:lnTo>
+                  <a:lnTo>
+                    <a:pt x="3326594" y="0"/>
+                  </a:lnTo>
+                  <a:lnTo>
+                    <a:pt x="3326594" y="202685"/>
+                  </a:lnTo>
+                  <a:lnTo>
+                    <a:pt x="3284485" y="218745"/>
+                  </a:lnTo>
+                  <a:lnTo>
+                    <a:pt x="3242377" y="234810"/>
+                  </a:lnTo>
+                  <a:lnTo>
+                    <a:pt x="3200268" y="250878"/>
+                  </a:lnTo>
+                  <a:lnTo>
+                    <a:pt x="3158159" y="266950"/>
+                  </a:lnTo>
+                  <a:lnTo>
+                    <a:pt x="3116050" y="283027"/>
+                  </a:lnTo>
+                  <a:lnTo>
+                    <a:pt x="3073941" y="299109"/>
+                  </a:lnTo>
+                  <a:lnTo>
+                    <a:pt x="3031833" y="315196"/>
+                  </a:lnTo>
+                  <a:lnTo>
+                    <a:pt x="2989724" y="331288"/>
+                  </a:lnTo>
+                  <a:lnTo>
+                    <a:pt x="2947615" y="347386"/>
+                  </a:lnTo>
+                  <a:lnTo>
+                    <a:pt x="2905506" y="363490"/>
+                  </a:lnTo>
+                  <a:lnTo>
+                    <a:pt x="2863397" y="379600"/>
+                  </a:lnTo>
+                  <a:lnTo>
+                    <a:pt x="2821289" y="395718"/>
+                  </a:lnTo>
+                  <a:lnTo>
+                    <a:pt x="2779180" y="411843"/>
+                  </a:lnTo>
+                  <a:lnTo>
+                    <a:pt x="2737071" y="427976"/>
+                  </a:lnTo>
+                  <a:lnTo>
+                    <a:pt x="2694962" y="444118"/>
+                  </a:lnTo>
+                  <a:lnTo>
+                    <a:pt x="2652854" y="460269"/>
+                  </a:lnTo>
+                  <a:lnTo>
+                    <a:pt x="2610745" y="476431"/>
+                  </a:lnTo>
+                  <a:lnTo>
+                    <a:pt x="2568636" y="492604"/>
+                  </a:lnTo>
+                  <a:lnTo>
+                    <a:pt x="2526527" y="508788"/>
+                  </a:lnTo>
+                  <a:lnTo>
+                    <a:pt x="2484418" y="524986"/>
+                  </a:lnTo>
+                  <a:lnTo>
+                    <a:pt x="2442310" y="541197"/>
+                  </a:lnTo>
+                  <a:lnTo>
+                    <a:pt x="2400201" y="557424"/>
+                  </a:lnTo>
+                  <a:lnTo>
+                    <a:pt x="2358092" y="573668"/>
+                  </a:lnTo>
+                  <a:lnTo>
+                    <a:pt x="2315983" y="589930"/>
+                  </a:lnTo>
+                  <a:lnTo>
+                    <a:pt x="2273874" y="606212"/>
+                  </a:lnTo>
+                  <a:lnTo>
+                    <a:pt x="2231766" y="622516"/>
+                  </a:lnTo>
+                  <a:lnTo>
+                    <a:pt x="2189657" y="638843"/>
+                  </a:lnTo>
+                  <a:lnTo>
+                    <a:pt x="2147548" y="655198"/>
+                  </a:lnTo>
+                  <a:lnTo>
+                    <a:pt x="2105439" y="671581"/>
+                  </a:lnTo>
+                  <a:lnTo>
+                    <a:pt x="2063330" y="687997"/>
+                  </a:lnTo>
+                  <a:lnTo>
+                    <a:pt x="2021222" y="704448"/>
+                  </a:lnTo>
+                  <a:lnTo>
+                    <a:pt x="1979113" y="720938"/>
+                  </a:lnTo>
+                  <a:lnTo>
+                    <a:pt x="1937004" y="737472"/>
+                  </a:lnTo>
+                  <a:lnTo>
+                    <a:pt x="1894895" y="754054"/>
+                  </a:lnTo>
+                  <a:lnTo>
+                    <a:pt x="1852786" y="770690"/>
+                  </a:lnTo>
+                  <a:lnTo>
+                    <a:pt x="1810678" y="787384"/>
+                  </a:lnTo>
+                  <a:lnTo>
+                    <a:pt x="1768569" y="804143"/>
+                  </a:lnTo>
+                  <a:lnTo>
+                    <a:pt x="1726460" y="820974"/>
+                  </a:lnTo>
+                  <a:lnTo>
+                    <a:pt x="1684351" y="837884"/>
+                  </a:lnTo>
+                  <a:lnTo>
+                    <a:pt x="1642242" y="854881"/>
+                  </a:lnTo>
+                  <a:lnTo>
+                    <a:pt x="1600134" y="871972"/>
+                  </a:lnTo>
+                  <a:lnTo>
+                    <a:pt x="1558025" y="889166"/>
+                  </a:lnTo>
+                  <a:lnTo>
+                    <a:pt x="1515916" y="906470"/>
+                  </a:lnTo>
+                  <a:lnTo>
+                    <a:pt x="1473807" y="923892"/>
+                  </a:lnTo>
+                  <a:lnTo>
+                    <a:pt x="1431698" y="941438"/>
+                  </a:lnTo>
+                  <a:lnTo>
+                    <a:pt x="1389590" y="959114"/>
+                  </a:lnTo>
+                  <a:lnTo>
+                    <a:pt x="1347481" y="976924"/>
+                  </a:lnTo>
+                  <a:lnTo>
+                    <a:pt x="1305372" y="994871"/>
+                  </a:lnTo>
+                  <a:lnTo>
+                    <a:pt x="1263263" y="1012954"/>
+                  </a:lnTo>
+                  <a:lnTo>
+                    <a:pt x="1221155" y="1031174"/>
+                  </a:lnTo>
+                  <a:lnTo>
+                    <a:pt x="1179046" y="1049527"/>
+                  </a:lnTo>
+                  <a:lnTo>
+                    <a:pt x="1136937" y="1068008"/>
+                  </a:lnTo>
+                  <a:lnTo>
+                    <a:pt x="1094828" y="1086611"/>
+                  </a:lnTo>
+                  <a:lnTo>
+                    <a:pt x="1052719" y="1105330"/>
+                  </a:lnTo>
+                  <a:lnTo>
+                    <a:pt x="1010611" y="1124157"/>
+                  </a:lnTo>
+                  <a:lnTo>
+                    <a:pt x="968502" y="1143083"/>
+                  </a:lnTo>
+                  <a:lnTo>
+                    <a:pt x="926393" y="1162102"/>
+                  </a:lnTo>
+                  <a:lnTo>
+                    <a:pt x="884284" y="1181205"/>
+                  </a:lnTo>
+                  <a:lnTo>
+                    <a:pt x="842175" y="1200384"/>
+                  </a:lnTo>
+                  <a:lnTo>
+                    <a:pt x="800067" y="1219634"/>
+                  </a:lnTo>
+                  <a:lnTo>
+                    <a:pt x="757958" y="1238946"/>
+                  </a:lnTo>
+                  <a:lnTo>
+                    <a:pt x="715849" y="1258315"/>
+                  </a:lnTo>
+                  <a:lnTo>
+                    <a:pt x="673740" y="1277736"/>
+                  </a:lnTo>
+                  <a:lnTo>
+                    <a:pt x="631631" y="1297204"/>
+                  </a:lnTo>
+                  <a:lnTo>
+                    <a:pt x="589523" y="1316713"/>
+                  </a:lnTo>
+                  <a:lnTo>
+                    <a:pt x="547414" y="1336261"/>
+                  </a:lnTo>
+                  <a:lnTo>
+                    <a:pt x="505305" y="1355843"/>
+                  </a:lnTo>
+                  <a:lnTo>
+                    <a:pt x="463196" y="1375456"/>
+                  </a:lnTo>
+                  <a:lnTo>
+                    <a:pt x="421087" y="1395097"/>
+                  </a:lnTo>
+                  <a:lnTo>
+                    <a:pt x="378979" y="1414765"/>
+                  </a:lnTo>
+                  <a:lnTo>
+                    <a:pt x="336870" y="1434455"/>
+                  </a:lnTo>
+                  <a:lnTo>
+                    <a:pt x="294761" y="1454167"/>
+                  </a:lnTo>
+                  <a:lnTo>
+                    <a:pt x="252652" y="1473898"/>
+                  </a:lnTo>
+                  <a:lnTo>
+                    <a:pt x="210543" y="1493647"/>
+                  </a:lnTo>
+                  <a:lnTo>
+                    <a:pt x="168435" y="1513412"/>
+                  </a:lnTo>
+                  <a:lnTo>
+                    <a:pt x="126326" y="1533192"/>
+                  </a:lnTo>
+                  <a:lnTo>
+                    <a:pt x="84217" y="1552986"/>
+                  </a:lnTo>
+                  <a:lnTo>
+                    <a:pt x="42108" y="1572792"/>
+                  </a:lnTo>
+                  <a:lnTo>
+                    <a:pt x="0" y="1592610"/>
+                  </a:lnTo>
+                  <a:close/>
+                </a:path>
+              </a:pathLst>
+            </a:custGeom>
+            <a:solidFill>
+              <a:srgbClr val="E31A1C">
+                <a:alpha val="14901"/>
+              </a:srgbClr>
+            </a:solidFill>
+          </p:spPr>
+          <p:txBody>
+            <a:bodyPr/>
+            <a:lstStyle/>
+            <a:p/>
+          </p:txBody>
+        </p:sp>
+        <p:sp>
+          <p:nvSpPr>
+            <p:cNvPr id="971" name="pl971"/>
+            <p:cNvSpPr/>
+            <p:nvPr/>
+          </p:nvSpPr>
+          <p:spPr>
+            <a:xfrm>
+              <a:off x="2171462" y="3392835"/>
+              <a:ext cx="3326594" cy="1453054"/>
+            </a:xfrm>
+            <a:custGeom>
+              <a:avLst/>
+              <a:pathLst>
+                <a:path w="3326594" h="1453054">
+                  <a:moveTo>
+                    <a:pt x="0" y="1453054"/>
+                  </a:moveTo>
+                  <a:lnTo>
+                    <a:pt x="42108" y="1436885"/>
+                  </a:lnTo>
+                  <a:lnTo>
+                    <a:pt x="84217" y="1420705"/>
+                  </a:lnTo>
+                  <a:lnTo>
+                    <a:pt x="126326" y="1404511"/>
+                  </a:lnTo>
+                  <a:lnTo>
+                    <a:pt x="168435" y="1388304"/>
+                  </a:lnTo>
+                  <a:lnTo>
+                    <a:pt x="210543" y="1372082"/>
+                  </a:lnTo>
+                  <a:lnTo>
+                    <a:pt x="252652" y="1355844"/>
+                  </a:lnTo>
+                  <a:lnTo>
+                    <a:pt x="294761" y="1339588"/>
+                  </a:lnTo>
+                  <a:lnTo>
+                    <a:pt x="336870" y="1323313"/>
+                  </a:lnTo>
+                  <a:lnTo>
+                    <a:pt x="378979" y="1307016"/>
+                  </a:lnTo>
+                  <a:lnTo>
+                    <a:pt x="421087" y="1290696"/>
+                  </a:lnTo>
+                  <a:lnTo>
+                    <a:pt x="463196" y="1274351"/>
+                  </a:lnTo>
+                  <a:lnTo>
+                    <a:pt x="505305" y="1257977"/>
+                  </a:lnTo>
+                  <a:lnTo>
+                    <a:pt x="547414" y="1241572"/>
+                  </a:lnTo>
+                  <a:lnTo>
+                    <a:pt x="589523" y="1225132"/>
+                  </a:lnTo>
+                  <a:lnTo>
+                    <a:pt x="631631" y="1208654"/>
+                  </a:lnTo>
+                  <a:lnTo>
+                    <a:pt x="673740" y="1192135"/>
+                  </a:lnTo>
+                  <a:lnTo>
+                    <a:pt x="715849" y="1175569"/>
+                  </a:lnTo>
+                  <a:lnTo>
+                    <a:pt x="757958" y="1158951"/>
+                  </a:lnTo>
+                  <a:lnTo>
+                    <a:pt x="800067" y="1142276"/>
+                  </a:lnTo>
+                  <a:lnTo>
+                    <a:pt x="842175" y="1125538"/>
+                  </a:lnTo>
+                  <a:lnTo>
+                    <a:pt x="884284" y="1108731"/>
+                  </a:lnTo>
+                  <a:lnTo>
+                    <a:pt x="926393" y="1091846"/>
+                  </a:lnTo>
+                  <a:lnTo>
+                    <a:pt x="968502" y="1074878"/>
+                  </a:lnTo>
+                  <a:lnTo>
+                    <a:pt x="1010611" y="1057818"/>
+                  </a:lnTo>
+                  <a:lnTo>
+                    <a:pt x="1052719" y="1040657"/>
+                  </a:lnTo>
+                  <a:lnTo>
+                    <a:pt x="1094828" y="1023389"/>
+                  </a:lnTo>
+                  <a:lnTo>
+                    <a:pt x="1136937" y="1006005"/>
+                  </a:lnTo>
+                  <a:lnTo>
+                    <a:pt x="1179046" y="988499"/>
+                  </a:lnTo>
+                  <a:lnTo>
+                    <a:pt x="1221155" y="970865"/>
+                  </a:lnTo>
+                  <a:lnTo>
+                    <a:pt x="1263263" y="953097"/>
+                  </a:lnTo>
+                  <a:lnTo>
+                    <a:pt x="1305372" y="935194"/>
+                  </a:lnTo>
+                  <a:lnTo>
+                    <a:pt x="1347481" y="917154"/>
+                  </a:lnTo>
+                  <a:lnTo>
+                    <a:pt x="1389590" y="898977"/>
+                  </a:lnTo>
+                  <a:lnTo>
+                    <a:pt x="1431698" y="880666"/>
+                  </a:lnTo>
+                  <a:lnTo>
+                    <a:pt x="1473807" y="862225"/>
+                  </a:lnTo>
+                  <a:lnTo>
+                    <a:pt x="1515916" y="843659"/>
+                  </a:lnTo>
+                  <a:lnTo>
+                    <a:pt x="1558025" y="824976"/>
+                  </a:lnTo>
+                  <a:lnTo>
+                    <a:pt x="1600134" y="806183"/>
+                  </a:lnTo>
+                  <a:lnTo>
+                    <a:pt x="1642242" y="787287"/>
+                  </a:lnTo>
+                  <a:lnTo>
+                    <a:pt x="1684351" y="768297"/>
+                  </a:lnTo>
+                  <a:lnTo>
+                    <a:pt x="1726460" y="749220"/>
+                  </a:lnTo>
+                  <a:lnTo>
+                    <a:pt x="1768569" y="730064"/>
+                  </a:lnTo>
+                  <a:lnTo>
+                    <a:pt x="1810678" y="710836"/>
+                  </a:lnTo>
+                  <a:lnTo>
+                    <a:pt x="1852786" y="691543"/>
+                  </a:lnTo>
+                  <a:lnTo>
+                    <a:pt x="1894895" y="672191"/>
+                  </a:lnTo>
+                  <a:lnTo>
+                    <a:pt x="1937004" y="652786"/>
+                  </a:lnTo>
+                  <a:lnTo>
+                    <a:pt x="1979113" y="633333"/>
+                  </a:lnTo>
+                  <a:lnTo>
+                    <a:pt x="2021222" y="613836"/>
+                  </a:lnTo>
+                  <a:lnTo>
+                    <a:pt x="2063330" y="594300"/>
+                  </a:lnTo>
+                  <a:lnTo>
+                    <a:pt x="2105439" y="574729"/>
+                  </a:lnTo>
+                  <a:lnTo>
+                    <a:pt x="2147548" y="555125"/>
+                  </a:lnTo>
+                  <a:lnTo>
+                    <a:pt x="2189657" y="535492"/>
+                  </a:lnTo>
+                  <a:lnTo>
+                    <a:pt x="2231766" y="515833"/>
+                  </a:lnTo>
+                  <a:lnTo>
+                    <a:pt x="2273874" y="496150"/>
+                  </a:lnTo>
+                  <a:lnTo>
+                    <a:pt x="2315983" y="476444"/>
+                  </a:lnTo>
+                  <a:lnTo>
+                    <a:pt x="2358092" y="456719"/>
+                  </a:lnTo>
+                  <a:lnTo>
+                    <a:pt x="2400201" y="436976"/>
+                  </a:lnTo>
+                  <a:lnTo>
+                    <a:pt x="2442310" y="417216"/>
+                  </a:lnTo>
+                  <a:lnTo>
+                    <a:pt x="2484418" y="397440"/>
+                  </a:lnTo>
+                  <a:lnTo>
+                    <a:pt x="2526527" y="377651"/>
+                  </a:lnTo>
+                  <a:lnTo>
+                    <a:pt x="2568636" y="357848"/>
+                  </a:lnTo>
+                  <a:lnTo>
+                    <a:pt x="2610745" y="338034"/>
+                  </a:lnTo>
+                  <a:lnTo>
+                    <a:pt x="2652854" y="318208"/>
+                  </a:lnTo>
+                  <a:lnTo>
+                    <a:pt x="2694962" y="298372"/>
+                  </a:lnTo>
+                  <a:lnTo>
+                    <a:pt x="2737071" y="278527"/>
+                  </a:lnTo>
+                  <a:lnTo>
+                    <a:pt x="2779180" y="258674"/>
+                  </a:lnTo>
+                  <a:lnTo>
+                    <a:pt x="2821289" y="238812"/>
+                  </a:lnTo>
+                  <a:lnTo>
+                    <a:pt x="2863397" y="218942"/>
+                  </a:lnTo>
+                  <a:lnTo>
+                    <a:pt x="2905506" y="199065"/>
+                  </a:lnTo>
+                  <a:lnTo>
+                    <a:pt x="2947615" y="179182"/>
+                  </a:lnTo>
+                  <a:lnTo>
+                    <a:pt x="2989724" y="159293"/>
+                  </a:lnTo>
+                  <a:lnTo>
+                    <a:pt x="3031833" y="139398"/>
+                  </a:lnTo>
+                  <a:lnTo>
+                    <a:pt x="3073941" y="119498"/>
+                  </a:lnTo>
+                  <a:lnTo>
+                    <a:pt x="3116050" y="99592"/>
+                  </a:lnTo>
+                  <a:lnTo>
+                    <a:pt x="3158159" y="79682"/>
+                  </a:lnTo>
+                  <a:lnTo>
+                    <a:pt x="3200268" y="59767"/>
+                  </a:lnTo>
+                  <a:lnTo>
+                    <a:pt x="3242377" y="39849"/>
+                  </a:lnTo>
+                  <a:lnTo>
+                    <a:pt x="3284485" y="19926"/>
+                  </a:lnTo>
+                  <a:lnTo>
+                    <a:pt x="3326594" y="0"/>
+                  </a:lnTo>
+                </a:path>
+              </a:pathLst>
+            </a:custGeom>
+          </p:spPr>
+          <p:txBody>
+            <a:bodyPr/>
+            <a:lstStyle/>
+            <a:p/>
+          </p:txBody>
+        </p:sp>
+        <p:sp>
+          <p:nvSpPr>
+            <p:cNvPr id="972" name="pl972"/>
+            <p:cNvSpPr/>
+            <p:nvPr/>
+          </p:nvSpPr>
+          <p:spPr>
+            <a:xfrm>
+              <a:off x="2171462" y="3595520"/>
+              <a:ext cx="3326594" cy="1389925"/>
+            </a:xfrm>
+            <a:custGeom>
+              <a:avLst/>
+              <a:pathLst>
+                <a:path w="3326594" h="1389925">
+                  <a:moveTo>
+                    <a:pt x="3326594" y="0"/>
+                  </a:moveTo>
+                  <a:lnTo>
+                    <a:pt x="3284485" y="16060"/>
+                  </a:lnTo>
+                  <a:lnTo>
+                    <a:pt x="3242377" y="32125"/>
+                  </a:lnTo>
+                  <a:lnTo>
+                    <a:pt x="3200268" y="48193"/>
+                  </a:lnTo>
+                  <a:lnTo>
+                    <a:pt x="3158159" y="64265"/>
+                  </a:lnTo>
+                  <a:lnTo>
+                    <a:pt x="3116050" y="80342"/>
+                  </a:lnTo>
+                  <a:lnTo>
+                    <a:pt x="3073941" y="96424"/>
+                  </a:lnTo>
+                  <a:lnTo>
+                    <a:pt x="3031833" y="112511"/>
+                  </a:lnTo>
+                  <a:lnTo>
+                    <a:pt x="2989724" y="128603"/>
+                  </a:lnTo>
+                  <a:lnTo>
+                    <a:pt x="2947615" y="144701"/>
+                  </a:lnTo>
+                  <a:lnTo>
+                    <a:pt x="2905506" y="160805"/>
+                  </a:lnTo>
+                  <a:lnTo>
+                    <a:pt x="2863397" y="176915"/>
+                  </a:lnTo>
+                  <a:lnTo>
+                    <a:pt x="2821289" y="193033"/>
+                  </a:lnTo>
+                  <a:lnTo>
+                    <a:pt x="2779180" y="209158"/>
+                  </a:lnTo>
+                  <a:lnTo>
+                    <a:pt x="2737071" y="225291"/>
+                  </a:lnTo>
+                  <a:lnTo>
+                    <a:pt x="2694962" y="241433"/>
+                  </a:lnTo>
+                  <a:lnTo>
+                    <a:pt x="2652854" y="257584"/>
+                  </a:lnTo>
+                  <a:lnTo>
+                    <a:pt x="2610745" y="273746"/>
+                  </a:lnTo>
+                  <a:lnTo>
+                    <a:pt x="2568636" y="289919"/>
+                  </a:lnTo>
+                  <a:lnTo>
+                    <a:pt x="2526527" y="306103"/>
+                  </a:lnTo>
+                  <a:lnTo>
+                    <a:pt x="2484418" y="322301"/>
+                  </a:lnTo>
+                  <a:lnTo>
+                    <a:pt x="2442310" y="338512"/>
+                  </a:lnTo>
+                  <a:lnTo>
+                    <a:pt x="2400201" y="354739"/>
+                  </a:lnTo>
+                  <a:lnTo>
+                    <a:pt x="2358092" y="370983"/>
+                  </a:lnTo>
+                  <a:lnTo>
+                    <a:pt x="2315983" y="387245"/>
+                  </a:lnTo>
+                  <a:lnTo>
+                    <a:pt x="2273874" y="403527"/>
+                  </a:lnTo>
+                  <a:lnTo>
+                    <a:pt x="2231766" y="419831"/>
+                  </a:lnTo>
+                  <a:lnTo>
+                    <a:pt x="2189657" y="436158"/>
+                  </a:lnTo>
+                  <a:lnTo>
+                    <a:pt x="2147548" y="452513"/>
+                  </a:lnTo>
+                  <a:lnTo>
+                    <a:pt x="2105439" y="468896"/>
+                  </a:lnTo>
+                  <a:lnTo>
+                    <a:pt x="2063330" y="485312"/>
+                  </a:lnTo>
+                  <a:lnTo>
+                    <a:pt x="2021222" y="501763"/>
+                  </a:lnTo>
+                  <a:lnTo>
+                    <a:pt x="1979113" y="518253"/>
+                  </a:lnTo>
+                  <a:lnTo>
+                    <a:pt x="1937004" y="534787"/>
+                  </a:lnTo>
+                  <a:lnTo>
+                    <a:pt x="1894895" y="551369"/>
+                  </a:lnTo>
+                  <a:lnTo>
+                    <a:pt x="1852786" y="568004"/>
+                  </a:lnTo>
+                  <a:lnTo>
+                    <a:pt x="1810678" y="584699"/>
+                  </a:lnTo>
+                  <a:lnTo>
+                    <a:pt x="1768569" y="601458"/>
+                  </a:lnTo>
+                  <a:lnTo>
+                    <a:pt x="1726460" y="618289"/>
+                  </a:lnTo>
+                  <a:lnTo>
+                    <a:pt x="1684351" y="635199"/>
+                  </a:lnTo>
+                  <a:lnTo>
+                    <a:pt x="1642242" y="652196"/>
+                  </a:lnTo>
+                  <a:lnTo>
+                    <a:pt x="1600134" y="669287"/>
+                  </a:lnTo>
+                  <a:lnTo>
+                    <a:pt x="1558025" y="686481"/>
+                  </a:lnTo>
+                  <a:lnTo>
+                    <a:pt x="1515916" y="703785"/>
+                  </a:lnTo>
+                  <a:lnTo>
+                    <a:pt x="1473807" y="721207"/>
+                  </a:lnTo>
+                  <a:lnTo>
+                    <a:pt x="1431698" y="738753"/>
+                  </a:lnTo>
+                  <a:lnTo>
+                    <a:pt x="1389590" y="756429"/>
+                  </a:lnTo>
+                  <a:lnTo>
+                    <a:pt x="1347481" y="774239"/>
+                  </a:lnTo>
+                  <a:lnTo>
+                    <a:pt x="1305372" y="792186"/>
+                  </a:lnTo>
+                  <a:lnTo>
+                    <a:pt x="1263263" y="810269"/>
+                  </a:lnTo>
+                  <a:lnTo>
+                    <a:pt x="1221155" y="828489"/>
+                  </a:lnTo>
+                  <a:lnTo>
+                    <a:pt x="1179046" y="846842"/>
+                  </a:lnTo>
+                  <a:lnTo>
+                    <a:pt x="1136937" y="865323"/>
+                  </a:lnTo>
+                  <a:lnTo>
+                    <a:pt x="1094828" y="883926"/>
+                  </a:lnTo>
+                  <a:lnTo>
+                    <a:pt x="1052719" y="902645"/>
+                  </a:lnTo>
+                  <a:lnTo>
+                    <a:pt x="1010611" y="921472"/>
+                  </a:lnTo>
+                  <a:lnTo>
+                    <a:pt x="968502" y="940398"/>
+                  </a:lnTo>
+                  <a:lnTo>
+                    <a:pt x="926393" y="959417"/>
+                  </a:lnTo>
+                  <a:lnTo>
+                    <a:pt x="884284" y="978520"/>
+                  </a:lnTo>
+                  <a:lnTo>
+                    <a:pt x="842175" y="997699"/>
+                  </a:lnTo>
+                  <a:lnTo>
+                    <a:pt x="800067" y="1016949"/>
+                  </a:lnTo>
+                  <a:lnTo>
+                    <a:pt x="757958" y="1036261"/>
+                  </a:lnTo>
+                  <a:lnTo>
+                    <a:pt x="715849" y="1055630"/>
+                  </a:lnTo>
+                  <a:lnTo>
+                    <a:pt x="673740" y="1075051"/>
+                  </a:lnTo>
+                  <a:lnTo>
+                    <a:pt x="631631" y="1094519"/>
+                  </a:lnTo>
+                  <a:lnTo>
+                    <a:pt x="589523" y="1114028"/>
+                  </a:lnTo>
+                  <a:lnTo>
+                    <a:pt x="547414" y="1133576"/>
+                  </a:lnTo>
+                  <a:lnTo>
+                    <a:pt x="505305" y="1153158"/>
+                  </a:lnTo>
+                  <a:lnTo>
+                    <a:pt x="463196" y="1172771"/>
+                  </a:lnTo>
+                  <a:lnTo>
+                    <a:pt x="421087" y="1192412"/>
+                  </a:lnTo>
+                  <a:lnTo>
+                    <a:pt x="378979" y="1212080"/>
+                  </a:lnTo>
+                  <a:lnTo>
+                    <a:pt x="336870" y="1231770"/>
+                  </a:lnTo>
+                  <a:lnTo>
+                    <a:pt x="294761" y="1251482"/>
+                  </a:lnTo>
+                  <a:lnTo>
+                    <a:pt x="252652" y="1271213"/>
+                  </a:lnTo>
+                  <a:lnTo>
+                    <a:pt x="210543" y="1290962"/>
+                  </a:lnTo>
+                  <a:lnTo>
+                    <a:pt x="168435" y="1310727"/>
+                  </a:lnTo>
+                  <a:lnTo>
+                    <a:pt x="126326" y="1330507"/>
+                  </a:lnTo>
+                  <a:lnTo>
+                    <a:pt x="84217" y="1350301"/>
+                  </a:lnTo>
+                  <a:lnTo>
+                    <a:pt x="42108" y="1370107"/>
+                  </a:lnTo>
+                  <a:lnTo>
+                    <a:pt x="0" y="1389925"/>
+                  </a:lnTo>
+                </a:path>
+              </a:pathLst>
+            </a:custGeom>
+          </p:spPr>
+          <p:txBody>
+            <a:bodyPr/>
+            <a:lstStyle/>
+            <a:p/>
+          </p:txBody>
+        </p:sp>
+        <p:sp>
+          <p:nvSpPr>
+            <p:cNvPr id="973" name="pl973"/>
+            <p:cNvSpPr/>
+            <p:nvPr/>
+          </p:nvSpPr>
+          <p:spPr>
+            <a:xfrm>
+              <a:off x="2171462" y="3494178"/>
+              <a:ext cx="3326594" cy="1421490"/>
+            </a:xfrm>
+            <a:custGeom>
+              <a:avLst/>
+              <a:pathLst>
+                <a:path w="3326594" h="1421490">
+                  <a:moveTo>
+                    <a:pt x="0" y="1421490"/>
+                  </a:moveTo>
+                  <a:lnTo>
+                    <a:pt x="42108" y="1403496"/>
+                  </a:lnTo>
+                  <a:lnTo>
+                    <a:pt x="84217" y="1385503"/>
+                  </a:lnTo>
+                  <a:lnTo>
+                    <a:pt x="126326" y="1367509"/>
+                  </a:lnTo>
+                  <a:lnTo>
+                    <a:pt x="168435" y="1349516"/>
+                  </a:lnTo>
+                  <a:lnTo>
+                    <a:pt x="210543" y="1331522"/>
+                  </a:lnTo>
+                  <a:lnTo>
+                    <a:pt x="252652" y="1313529"/>
+                  </a:lnTo>
+                  <a:lnTo>
+                    <a:pt x="294761" y="1295535"/>
+                  </a:lnTo>
+                  <a:lnTo>
+                    <a:pt x="336870" y="1277541"/>
+                  </a:lnTo>
+                  <a:lnTo>
+                    <a:pt x="378979" y="1259548"/>
+                  </a:lnTo>
+                  <a:lnTo>
+                    <a:pt x="421087" y="1241554"/>
+                  </a:lnTo>
+                  <a:lnTo>
+                    <a:pt x="463196" y="1223561"/>
+                  </a:lnTo>
+                  <a:lnTo>
+                    <a:pt x="505305" y="1205567"/>
+                  </a:lnTo>
+                  <a:lnTo>
+                    <a:pt x="547414" y="1187574"/>
+                  </a:lnTo>
+                  <a:lnTo>
+                    <a:pt x="589523" y="1169580"/>
+                  </a:lnTo>
+                  <a:lnTo>
+                    <a:pt x="631631" y="1151587"/>
+                  </a:lnTo>
+                  <a:lnTo>
+                    <a:pt x="673740" y="1133593"/>
+                  </a:lnTo>
+                  <a:lnTo>
+                    <a:pt x="715849" y="1115599"/>
+                  </a:lnTo>
+                  <a:lnTo>
+                    <a:pt x="757958" y="1097606"/>
+                  </a:lnTo>
+                  <a:lnTo>
+                    <a:pt x="800067" y="1079612"/>
+                  </a:lnTo>
+                  <a:lnTo>
+                    <a:pt x="842175" y="1061619"/>
+                  </a:lnTo>
+                  <a:lnTo>
+                    <a:pt x="884284" y="1043625"/>
+                  </a:lnTo>
+                  <a:lnTo>
+                    <a:pt x="926393" y="1025632"/>
+                  </a:lnTo>
+                  <a:lnTo>
+                    <a:pt x="968502" y="1007638"/>
+                  </a:lnTo>
+                  <a:lnTo>
+                    <a:pt x="1010611" y="989645"/>
+                  </a:lnTo>
+                  <a:lnTo>
+                    <a:pt x="1052719" y="971651"/>
+                  </a:lnTo>
+                  <a:lnTo>
+                    <a:pt x="1094828" y="953658"/>
+                  </a:lnTo>
+                  <a:lnTo>
+                    <a:pt x="1136937" y="935664"/>
+                  </a:lnTo>
+                  <a:lnTo>
+                    <a:pt x="1179046" y="917670"/>
+                  </a:lnTo>
+                  <a:lnTo>
+                    <a:pt x="1221155" y="899677"/>
+                  </a:lnTo>
+                  <a:lnTo>
+                    <a:pt x="1263263" y="881683"/>
+                  </a:lnTo>
+                  <a:lnTo>
+                    <a:pt x="1305372" y="863690"/>
+                  </a:lnTo>
+                  <a:lnTo>
+                    <a:pt x="1347481" y="845696"/>
+                  </a:lnTo>
+                  <a:lnTo>
+                    <a:pt x="1389590" y="827703"/>
+                  </a:lnTo>
+                  <a:lnTo>
+                    <a:pt x="1431698" y="809709"/>
+                  </a:lnTo>
+                  <a:lnTo>
+                    <a:pt x="1473807" y="791716"/>
+                  </a:lnTo>
+                  <a:lnTo>
+                    <a:pt x="1515916" y="773722"/>
+                  </a:lnTo>
+                  <a:lnTo>
+                    <a:pt x="1558025" y="755729"/>
+                  </a:lnTo>
+                  <a:lnTo>
+                    <a:pt x="1600134" y="737735"/>
+                  </a:lnTo>
+                  <a:lnTo>
+                    <a:pt x="1642242" y="719741"/>
+                  </a:lnTo>
+                  <a:lnTo>
+                    <a:pt x="1684351" y="701748"/>
+                  </a:lnTo>
+                  <a:lnTo>
+                    <a:pt x="1726460" y="683754"/>
+                  </a:lnTo>
+                  <a:lnTo>
+                    <a:pt x="1768569" y="665761"/>
+                  </a:lnTo>
+                  <a:lnTo>
+                    <a:pt x="1810678" y="647767"/>
+                  </a:lnTo>
+                  <a:lnTo>
+                    <a:pt x="1852786" y="629774"/>
+                  </a:lnTo>
+                  <a:lnTo>
+                    <a:pt x="1894895" y="611780"/>
+                  </a:lnTo>
+                  <a:lnTo>
+                    <a:pt x="1937004" y="593787"/>
+                  </a:lnTo>
+                  <a:lnTo>
+                    <a:pt x="1979113" y="575793"/>
+                  </a:lnTo>
+                  <a:lnTo>
+                    <a:pt x="2021222" y="557799"/>
+                  </a:lnTo>
+                  <a:lnTo>
+                    <a:pt x="2063330" y="539806"/>
+                  </a:lnTo>
+                  <a:lnTo>
+                    <a:pt x="2105439" y="521812"/>
+                  </a:lnTo>
+                  <a:lnTo>
+                    <a:pt x="2147548" y="503819"/>
+                  </a:lnTo>
+                  <a:lnTo>
+                    <a:pt x="2189657" y="485825"/>
+                  </a:lnTo>
+                  <a:lnTo>
+                    <a:pt x="2231766" y="467832"/>
+                  </a:lnTo>
+                  <a:lnTo>
+                    <a:pt x="2273874" y="449838"/>
+                  </a:lnTo>
+                  <a:lnTo>
+                    <a:pt x="2315983" y="431845"/>
+                  </a:lnTo>
+                  <a:lnTo>
+                    <a:pt x="2358092" y="413851"/>
+                  </a:lnTo>
+                  <a:lnTo>
+                    <a:pt x="2400201" y="395858"/>
+                  </a:lnTo>
+                  <a:lnTo>
+                    <a:pt x="2442310" y="377864"/>
+                  </a:lnTo>
+                  <a:lnTo>
+                    <a:pt x="2484418" y="359870"/>
+                  </a:lnTo>
+                  <a:lnTo>
+                    <a:pt x="2526527" y="341877"/>
+                  </a:lnTo>
+                  <a:lnTo>
+                    <a:pt x="2568636" y="323883"/>
+                  </a:lnTo>
+                  <a:lnTo>
+                    <a:pt x="2610745" y="305890"/>
+                  </a:lnTo>
+                  <a:lnTo>
+                    <a:pt x="2652854" y="287896"/>
+                  </a:lnTo>
+                  <a:lnTo>
+                    <a:pt x="2694962" y="269903"/>
+                  </a:lnTo>
+                  <a:lnTo>
+                    <a:pt x="2737071" y="251909"/>
+                  </a:lnTo>
+                  <a:lnTo>
+                    <a:pt x="2779180" y="233916"/>
+                  </a:lnTo>
+                  <a:lnTo>
+                    <a:pt x="2821289" y="215922"/>
+                  </a:lnTo>
+                  <a:lnTo>
+                    <a:pt x="2863397" y="197929"/>
+                  </a:lnTo>
+                  <a:lnTo>
+                    <a:pt x="2905506" y="179935"/>
+                  </a:lnTo>
+                  <a:lnTo>
+                    <a:pt x="2947615" y="161941"/>
+                  </a:lnTo>
+                  <a:lnTo>
+                    <a:pt x="2989724" y="143948"/>
+                  </a:lnTo>
+                  <a:lnTo>
+                    <a:pt x="3031833" y="125954"/>
+                  </a:lnTo>
+                  <a:lnTo>
+                    <a:pt x="3073941" y="107961"/>
+                  </a:lnTo>
+                  <a:lnTo>
+                    <a:pt x="3116050" y="89967"/>
+                  </a:lnTo>
+                  <a:lnTo>
+                    <a:pt x="3158159" y="71974"/>
+                  </a:lnTo>
+                  <a:lnTo>
+                    <a:pt x="3200268" y="53980"/>
+                  </a:lnTo>
+                  <a:lnTo>
+                    <a:pt x="3242377" y="35987"/>
+                  </a:lnTo>
+                  <a:lnTo>
+                    <a:pt x="3284485" y="17993"/>
+                  </a:lnTo>
+                  <a:lnTo>
+                    <a:pt x="3326594" y="0"/>
+                  </a:lnTo>
+                </a:path>
+              </a:pathLst>
+            </a:custGeom>
+            <a:ln w="27101" cap="flat">
+              <a:solidFill>
+                <a:srgbClr val="E31A1C">
+                  <a:alpha val="100000"/>
+                </a:srgbClr>
+              </a:solidFill>
+              <a:prstDash val="solid"/>
+              <a:round/>
+            </a:ln>
+          </p:spPr>
+          <p:txBody>
+            <a:bodyPr/>
+            <a:lstStyle/>
+            <a:p/>
+          </p:txBody>
+        </p:sp>
+        <p:sp>
+          <p:nvSpPr>
+            <p:cNvPr id="974" name="tx974"/>
             <p:cNvSpPr/>
             <p:nvPr/>
           </p:nvSpPr>
@@ -36130,7 +38190,7 @@
         </p:sp>
         <p:sp>
           <p:nvSpPr>
-            <p:cNvPr id="967" name="tx967"/>
+            <p:cNvPr id="975" name="tx975"/>
             <p:cNvSpPr/>
             <p:nvPr/>
           </p:nvSpPr>
@@ -36176,7 +38236,7 @@
         </p:sp>
         <p:sp>
           <p:nvSpPr>
-            <p:cNvPr id="968" name="tx968"/>
+            <p:cNvPr id="976" name="tx976"/>
             <p:cNvSpPr/>
             <p:nvPr/>
           </p:nvSpPr>
@@ -36222,7 +38282,7 @@
         </p:sp>
         <p:sp>
           <p:nvSpPr>
-            <p:cNvPr id="969" name="tx969"/>
+            <p:cNvPr id="977" name="tx977"/>
             <p:cNvSpPr/>
             <p:nvPr/>
           </p:nvSpPr>
@@ -36268,7 +38328,7 @@
         </p:sp>
         <p:sp>
           <p:nvSpPr>
-            <p:cNvPr id="970" name="tx970"/>
+            <p:cNvPr id="978" name="tx978"/>
             <p:cNvSpPr/>
             <p:nvPr/>
           </p:nvSpPr>
@@ -36314,7 +38374,7 @@
         </p:sp>
         <p:sp>
           <p:nvSpPr>
-            <p:cNvPr id="971" name="tx971"/>
+            <p:cNvPr id="979" name="tx979"/>
             <p:cNvSpPr/>
             <p:nvPr/>
           </p:nvSpPr>
@@ -36360,7 +38420,7 @@
         </p:sp>
         <p:sp>
           <p:nvSpPr>
-            <p:cNvPr id="972" name="tx972"/>
+            <p:cNvPr id="980" name="tx980"/>
             <p:cNvSpPr/>
             <p:nvPr/>
           </p:nvSpPr>
@@ -36406,7 +38466,7 @@
         </p:sp>
         <p:sp>
           <p:nvSpPr>
-            <p:cNvPr id="973" name="tx973"/>
+            <p:cNvPr id="981" name="tx981"/>
             <p:cNvSpPr/>
             <p:nvPr/>
           </p:nvSpPr>
@@ -36452,7 +38512,7 @@
         </p:sp>
         <p:sp>
           <p:nvSpPr>
-            <p:cNvPr id="974" name="tx974"/>
+            <p:cNvPr id="982" name="tx982"/>
             <p:cNvSpPr/>
             <p:nvPr/>
           </p:nvSpPr>
@@ -36498,7 +38558,7 @@
         </p:sp>
         <p:sp>
           <p:nvSpPr>
-            <p:cNvPr id="975" name="tx975"/>
+            <p:cNvPr id="983" name="tx983"/>
             <p:cNvSpPr/>
             <p:nvPr/>
           </p:nvSpPr>
@@ -36544,7 +38604,7 @@
         </p:sp>
         <p:sp>
           <p:nvSpPr>
-            <p:cNvPr id="976" name="tx976"/>
+            <p:cNvPr id="984" name="tx984"/>
             <p:cNvSpPr/>
             <p:nvPr/>
           </p:nvSpPr>
@@ -36590,7 +38650,7 @@
         </p:sp>
         <p:sp>
           <p:nvSpPr>
-            <p:cNvPr id="977" name="tx977"/>
+            <p:cNvPr id="985" name="tx985"/>
             <p:cNvSpPr/>
             <p:nvPr/>
           </p:nvSpPr>
@@ -36636,7 +38696,7 @@
         </p:sp>
         <p:sp>
           <p:nvSpPr>
-            <p:cNvPr id="978" name="tx978"/>
+            <p:cNvPr id="986" name="tx986"/>
             <p:cNvSpPr/>
             <p:nvPr/>
           </p:nvSpPr>
